--- a/classes/parte-10-seguridad-en-la-nube-y-contenedores/231-cloud-security-posture-management-cspm/clase-231-presentacion.pptx
+++ b/classes/parte-10-seguridad-en-la-nube-y-contenedores/231-cloud-security-posture-management-cspm/clase-231-presentacion.pptx
@@ -17,6 +17,10 @@
     <p:sldId id="265" r:id="rId16"/>
     <p:sldId id="266" r:id="rId17"/>
     <p:sldId id="267" r:id="rId18"/>
+    <p:sldId id="268" r:id="rId19"/>
+    <p:sldId id="269" r:id="rId20"/>
+    <p:sldId id="270" r:id="rId21"/>
+    <p:sldId id="271" r:id="rId22"/>
   </p:sldIdLst>
   <p:sldSz cx="9144000" cy="6858000" type="screen4x3"/>
   <p:notesSz cx="6858000" cy="9144000"/>
@@ -3198,7 +3202,7 @@
                   <a:srgbClr val="0B3D2E"/>
                 </a:solidFill>
               </a:rPr>
-              <a:t>⚠️ Errores comunes</a:t>
+              <a:t>🧪 Laboratorio guiado</a:t>
             </a:r>
           </a:p>
         </p:txBody>
@@ -3236,67 +3240,97 @@
                   <a:srgbClr val="22282E"/>
                 </a:solidFill>
               </a:rPr>
-              <a:t>•  Prowler falla con AccessDenied en muchos checks — Rol de auditoría sin permisos de lectura; usa la política gestionada de auditoría/seguridad.</a:t>
-            </a:r>
-          </a:p>
-          <a:p>
-            <a:pPr>
-              <a:spcAft>
-                <a:spcPts val="600"/>
-              </a:spcAft>
-            </a:pPr>
-            <a:r>
-              <a:rPr sz="1500">
-                <a:solidFill>
-                  <a:srgbClr val="22282E"/>
-                </a:solidFill>
-              </a:rPr>
-              <a:t>•  Miles de hallazgos abruman al equipo — Falta de priorización; filtra por severidad y exposición antes de repartir trabajo.</a:t>
-            </a:r>
-          </a:p>
-          <a:p>
-            <a:pPr>
-              <a:spcAft>
-                <a:spcPts val="600"/>
-              </a:spcAft>
-            </a:pPr>
-            <a:r>
-              <a:rPr sz="1500">
-                <a:solidFill>
-                  <a:srgbClr val="22282E"/>
-                </a:solidFill>
-              </a:rPr>
-              <a:t>•  Los hallazgos reaparecen — Se corrigió a mano y el IaC volvió a desplegar lo inseguro; corrige también en Terraform.</a:t>
-            </a:r>
-          </a:p>
-          <a:p>
-            <a:pPr>
-              <a:spcAft>
-                <a:spcPts val="600"/>
-              </a:spcAft>
-            </a:pPr>
-            <a:r>
-              <a:rPr sz="1500">
-                <a:solidFill>
-                  <a:srgbClr val="22282E"/>
-                </a:solidFill>
-              </a:rPr>
-              <a:t>•  Informe sin contexto de negocio — Todo tratado igual; añade criticidad del recurso a la priorización.</a:t>
-            </a:r>
-          </a:p>
-          <a:p>
-            <a:pPr>
-              <a:spcAft>
-                <a:spcPts val="600"/>
-              </a:spcAft>
-            </a:pPr>
-            <a:r>
-              <a:rPr sz="1500">
-                <a:solidFill>
-                  <a:srgbClr val="22282E"/>
-                </a:solidFill>
-              </a:rPr>
-              <a:t>•  Auditoría solo una vez — La postura deriva; automatiza ejecuciones periódicas y compara.</a:t>
+              <a:t>•  Crea un rol/SA de solo lectura para auditoría en tu cuenta de laboratorio (privilegio mínimo, sin permisos de escritura).</a:t>
+            </a:r>
+          </a:p>
+          <a:p>
+            <a:pPr>
+              <a:spcAft>
+                <a:spcPts val="600"/>
+              </a:spcAft>
+            </a:pPr>
+            <a:r>
+              <a:rPr sz="1500">
+                <a:solidFill>
+                  <a:srgbClr val="22282E"/>
+                </a:solidFill>
+              </a:rPr>
+              <a:t>•  Ejecuta prowler aws --compliance cis2.0aws -M html csv y abre el informe HTML; identifica los hallazgos críticos.</a:t>
+            </a:r>
+          </a:p>
+          <a:p>
+            <a:pPr>
+              <a:spcAft>
+                <a:spcPts val="600"/>
+              </a:spcAft>
+            </a:pPr>
+            <a:r>
+              <a:rPr sz="1500">
+                <a:solidFill>
+                  <a:srgbClr val="22282E"/>
+                </a:solidFill>
+              </a:rPr>
+              <a:t>•  Ejecuta scout aws y navega el informe: compara cómo ScoutSuite agrupa por servicio frente a la vista por control de Prowler.</a:t>
+            </a:r>
+          </a:p>
+          <a:p>
+            <a:pPr>
+              <a:spcAft>
+                <a:spcPts val="600"/>
+              </a:spcAft>
+            </a:pPr>
+            <a:r>
+              <a:rPr sz="1500">
+                <a:solidFill>
+                  <a:srgbClr val="22282E"/>
+                </a:solidFill>
+              </a:rPr>
+              <a:t>•  Prioriza: filtra por --severity critical high y construye una lista de los 10 hallazgos a remediar primero, justificando el orden por impacto.</a:t>
+            </a:r>
+          </a:p>
+          <a:p>
+            <a:pPr>
+              <a:spcAft>
+                <a:spcPts val="600"/>
+              </a:spcAft>
+            </a:pPr>
+            <a:r>
+              <a:rPr sz="1500">
+                <a:solidFill>
+                  <a:srgbClr val="22282E"/>
+                </a:solidFill>
+              </a:rPr>
+              <a:t>•  Remedia al menos tres (por ejemplo: activar cifrado por defecto, cerrar un SG abierto, habilitar CloudTrail) usando lo aprendido en la clase 223.</a:t>
+            </a:r>
+          </a:p>
+          <a:p>
+            <a:pPr>
+              <a:spcAft>
+                <a:spcPts val="600"/>
+              </a:spcAft>
+            </a:pPr>
+            <a:r>
+              <a:rPr sz="1500">
+                <a:solidFill>
+                  <a:srgbClr val="22282E"/>
+                </a:solidFill>
+              </a:rPr>
+              <a:t>•  Vuelve a ejecutar Prowler y compara el número de hallazgos antes/después; calcula el porcentaje de mejora.</a:t>
+            </a:r>
+          </a:p>
+          <a:p>
+            <a:pPr>
+              <a:spcAft>
+                <a:spcPts val="600"/>
+              </a:spcAft>
+            </a:pPr>
+            <a:r>
+              <a:rPr sz="1500">
+                <a:solidFill>
+                  <a:srgbClr val="22282E"/>
+                </a:solidFill>
+              </a:rPr>
+              <a:t>•  Automatiza: programa la auditoría (cron/CI) y guarda los informes con fecha para medir el drift de postura a lo largo del tiempo.</a:t>
             </a:r>
           </a:p>
         </p:txBody>
@@ -3347,7 +3381,7 @@
                   <a:srgbClr val="0B3D2E"/>
                 </a:solidFill>
               </a:rPr>
-              <a:t>❓ Preguntas frecuentes</a:t>
+              <a:t>✍️ Ejercicios</a:t>
             </a:r>
           </a:p>
         </p:txBody>
@@ -3385,82 +3419,82 @@
                   <a:srgbClr val="22282E"/>
                 </a:solidFill>
               </a:rPr>
-              <a:t>•  ❓ ¿CSPM sustituye al escaneo de IaC?</a:t>
-            </a:r>
-          </a:p>
-          <a:p>
-            <a:pPr>
-              <a:spcAft>
-                <a:spcPts val="600"/>
-              </a:spcAft>
-            </a:pPr>
-            <a:r>
-              <a:rPr sz="1500">
-                <a:solidFill>
-                  <a:srgbClr val="22282E"/>
-                </a:solidFill>
-              </a:rPr>
-              <a:t>•  No, se complementan. El escaneo IaC (clase 230) previene antes de desplegar; el CSPM detecta lo que ya está desplegado, incluidos cambios manuales o de terceros que el IaC no ve.</a:t>
-            </a:r>
-          </a:p>
-          <a:p>
-            <a:pPr>
-              <a:spcAft>
-                <a:spcPts val="600"/>
-              </a:spcAft>
-            </a:pPr>
-            <a:r>
-              <a:rPr sz="1500">
-                <a:solidFill>
-                  <a:srgbClr val="22282E"/>
-                </a:solidFill>
-              </a:rPr>
-              <a:t>•  ❓ ¿Necesito una herramienta comercial de CSPM?</a:t>
-            </a:r>
-          </a:p>
-          <a:p>
-            <a:pPr>
-              <a:spcAft>
-                <a:spcPts val="600"/>
-              </a:spcAft>
-            </a:pPr>
-            <a:r>
-              <a:rPr sz="1500">
-                <a:solidFill>
-                  <a:srgbClr val="22282E"/>
-                </a:solidFill>
-              </a:rPr>
-              <a:t>•  Para empezar no. Prowler y ScoutSuite cubren muy bien AWS/Azure/GCP con cientos de checks. Las soluciones comerciales añaden correlación, priorización avanzada y remediación automatizada a escala.</a:t>
-            </a:r>
-          </a:p>
-          <a:p>
-            <a:pPr>
-              <a:spcAft>
-                <a:spcPts val="600"/>
-              </a:spcAft>
-            </a:pPr>
-            <a:r>
-              <a:rPr sz="1500">
-                <a:solidFill>
-                  <a:srgbClr val="22282E"/>
-                </a:solidFill>
-              </a:rPr>
-              <a:t>•  ❓ ¿Cómo evito la fatiga de alertas?</a:t>
-            </a:r>
-          </a:p>
-          <a:p>
-            <a:pPr>
-              <a:spcAft>
-                <a:spcPts val="600"/>
-              </a:spcAft>
-            </a:pPr>
-            <a:r>
-              <a:rPr sz="1500">
-                <a:solidFill>
-                  <a:srgbClr val="22282E"/>
-                </a:solidFill>
-              </a:rPr>
-              <a:t>•  Prioriza: no todos los hallazgos importan igual. Cruza severidad con exposición a Internet y criticidad del recurso, remedia primero lo explotable y automatiza la supresión justificada de falsos positivos.</a:t>
+              <a:t>•  Ejecuta Prowler filtrando por un servicio concreto (p. ej. solo S3) e interpreta la salida.</a:t>
+            </a:r>
+          </a:p>
+          <a:p>
+            <a:pPr>
+              <a:spcAft>
+                <a:spcPts val="600"/>
+              </a:spcAft>
+            </a:pPr>
+            <a:r>
+              <a:rPr sz="1500">
+                <a:solidFill>
+                  <a:srgbClr val="22282E"/>
+                </a:solidFill>
+              </a:rPr>
+              <a:t>•  Genera un informe en formato OCSF/JSON y explica para qué sirve integrarlo en un SIEM.</a:t>
+            </a:r>
+          </a:p>
+          <a:p>
+            <a:pPr>
+              <a:spcAft>
+                <a:spcPts val="600"/>
+              </a:spcAft>
+            </a:pPr>
+            <a:r>
+              <a:rPr sz="1500">
+                <a:solidFill>
+                  <a:srgbClr val="22282E"/>
+                </a:solidFill>
+              </a:rPr>
+              <a:t>•  Mapea cinco hallazgos a su control CIS correspondiente.</a:t>
+            </a:r>
+          </a:p>
+          <a:p>
+            <a:pPr>
+              <a:spcAft>
+                <a:spcPts val="600"/>
+              </a:spcAft>
+            </a:pPr>
+            <a:r>
+              <a:rPr sz="1500">
+                <a:solidFill>
+                  <a:srgbClr val="22282E"/>
+                </a:solidFill>
+              </a:rPr>
+              <a:t>•  Diseña un criterio de priorización que combine severidad y exposición a Internet.</a:t>
+            </a:r>
+          </a:p>
+          <a:p>
+            <a:pPr>
+              <a:spcAft>
+                <a:spcPts val="600"/>
+              </a:spcAft>
+            </a:pPr>
+            <a:r>
+              <a:rPr sz="1500">
+                <a:solidFill>
+                  <a:srgbClr val="22282E"/>
+                </a:solidFill>
+              </a:rPr>
+              <a:t>•  Compara los hallazgos de Prowler y ScoutSuite sobre la misma cuenta y explica diferencias.</a:t>
+            </a:r>
+          </a:p>
+          <a:p>
+            <a:pPr>
+              <a:spcAft>
+                <a:spcPts val="600"/>
+              </a:spcAft>
+            </a:pPr>
+            <a:r>
+              <a:rPr sz="1500">
+                <a:solidFill>
+                  <a:srgbClr val="22282E"/>
+                </a:solidFill>
+              </a:rPr>
+              <a:t>•  Define tres métricas de postura (p. ej. % de recursos conformes, MTTR de remediación).</a:t>
             </a:r>
           </a:p>
         </p:txBody>
@@ -3511,7 +3545,7 @@
                   <a:srgbClr val="0B3D2E"/>
                 </a:solidFill>
               </a:rPr>
-              <a:t>🔗 Referencias</a:t>
+              <a:t>📝 Reto verificable</a:t>
             </a:r>
           </a:p>
         </p:txBody>
@@ -3549,71 +3583,608 @@
                   <a:srgbClr val="22282E"/>
                 </a:solidFill>
               </a:rPr>
-              <a:t>•  Prowler. &lt;https://github.com/prowler-cloud/prowler&gt;</a:t>
-            </a:r>
-          </a:p>
-          <a:p>
-            <a:pPr>
-              <a:spcAft>
-                <a:spcPts val="600"/>
-              </a:spcAft>
-            </a:pPr>
-            <a:r>
-              <a:rPr sz="1500">
-                <a:solidFill>
-                  <a:srgbClr val="22282E"/>
-                </a:solidFill>
-              </a:rPr>
-              <a:t>•  ScoutSuite. &lt;https://github.com/nccgroup/ScoutSuite&gt;</a:t>
-            </a:r>
-          </a:p>
-          <a:p>
-            <a:pPr>
-              <a:spcAft>
-                <a:spcPts val="600"/>
-              </a:spcAft>
-            </a:pPr>
-            <a:r>
-              <a:rPr sz="1500">
-                <a:solidFill>
-                  <a:srgbClr val="22282E"/>
-                </a:solidFill>
-              </a:rPr>
-              <a:t>•  CIS Benchmarks. &lt;https://www.cisecurity.org/cis-benchmarks&gt;</a:t>
-            </a:r>
-          </a:p>
-          <a:p>
-            <a:pPr>
-              <a:spcAft>
-                <a:spcPts val="600"/>
-              </a:spcAft>
-            </a:pPr>
-            <a:r>
-              <a:rPr sz="1500">
-                <a:solidFill>
-                  <a:srgbClr val="22282E"/>
-                </a:solidFill>
-              </a:rPr>
-              <a:t>•  AWS Security Hub (CSPM gestionado). &lt;https://docs.aws.amazon.com/securityhub/&gt;</a:t>
-            </a:r>
-          </a:p>
-          <a:p>
-            <a:pPr>
-              <a:spcAft>
-                <a:spcPts val="600"/>
-              </a:spcAft>
-            </a:pPr>
-            <a:r>
-              <a:rPr sz="1500">
-                <a:solidFill>
-                  <a:srgbClr val="22282E"/>
-                </a:solidFill>
-              </a:rPr>
-              <a:t>•  Microsoft Defender for Cloud (CSPM). &lt;https://learn.microsoft.com/azure/defender-for-cloud/concept-cloud-security-posture-management&gt;</a:t>
-            </a:r>
-          </a:p>
-        </p:txBody>
-      </p:sp>
+              <a:t>•  Audita una cuenta de laboratorio, prioriza y remedia hasta reducir a cero los hallazgos críticos, y</a:t>
+            </a:r>
+          </a:p>
+          <a:p>
+            <a:pPr>
+              <a:spcAft>
+                <a:spcPts val="600"/>
+              </a:spcAft>
+            </a:pPr>
+            <a:r>
+              <a:rPr sz="1500">
+                <a:solidFill>
+                  <a:srgbClr val="22282E"/>
+                </a:solidFill>
+              </a:rPr>
+              <a:t>•  documenta la mejora con dos ejecuciones de Prowler (antes/después).</a:t>
+            </a:r>
+          </a:p>
+          <a:p>
+            <a:pPr>
+              <a:spcAft>
+                <a:spcPts val="600"/>
+              </a:spcAft>
+            </a:pPr>
+            <a:r>
+              <a:rPr sz="1500">
+                <a:solidFill>
+                  <a:srgbClr val="22282E"/>
+                </a:solidFill>
+              </a:rPr>
+              <a:t>•  Criterio de aceptación: la segunda ejecución muestra 0 hallazgos críticos y un número de altos</a:t>
+            </a:r>
+          </a:p>
+          <a:p>
+            <a:pPr>
+              <a:spcAft>
+                <a:spcPts val="600"/>
+              </a:spcAft>
+            </a:pPr>
+            <a:r>
+              <a:rPr sz="1500">
+                <a:solidFill>
+                  <a:srgbClr val="22282E"/>
+                </a:solidFill>
+              </a:rPr>
+              <a:t>•  inferior al inicial; el informe incluye la lista priorizada, la evidencia de cada remediación y al</a:t>
+            </a:r>
+          </a:p>
+          <a:p>
+            <a:pPr>
+              <a:spcAft>
+                <a:spcPts val="600"/>
+              </a:spcAft>
+            </a:pPr>
+            <a:r>
+              <a:rPr sz="1500">
+                <a:solidFill>
+                  <a:srgbClr val="22282E"/>
+                </a:solidFill>
+              </a:rPr>
+              <a:t>•  menos una métrica de postura calculada.</a:t>
+            </a:r>
+          </a:p>
+        </p:txBody>
+      </p:sp>
+    </p:spTree>
+  </p:cSld>
+  <p:clrMapOvr>
+    <a:masterClrMapping/>
+  </p:clrMapOvr>
+</p:sld>
+</file>
+
+<file path=ppt/slides/slide13.xml><?xml version="1.0" encoding="utf-8"?>
+<p:sld xmlns:a="http://schemas.openxmlformats.org/drawingml/2006/main" xmlns:p="http://schemas.openxmlformats.org/presentationml/2006/main" xmlns:r="http://schemas.openxmlformats.org/officeDocument/2006/relationships">
+  <p:cSld>
+    <p:spTree>
+      <p:nvGrpSpPr>
+        <p:cNvPr id="1" name=""/>
+        <p:cNvGrpSpPr/>
+        <p:nvPr/>
+      </p:nvGrpSpPr>
+      <p:grpSpPr/>
+      <p:sp>
+        <p:nvSpPr>
+          <p:cNvPr id="2" name="TextBox 1"/>
+          <p:cNvSpPr txBox="1"/>
+          <p:nvPr/>
+        </p:nvSpPr>
+        <p:spPr>
+          <a:xfrm>
+            <a:off x="457200" y="320040"/>
+            <a:ext cx="8229600" cy="822960"/>
+          </a:xfrm>
+          <a:prstGeom prst="rect">
+            <a:avLst/>
+          </a:prstGeom>
+          <a:noFill/>
+        </p:spPr>
+        <p:txBody>
+          <a:bodyPr wrap="square">
+            <a:spAutoFit/>
+          </a:bodyPr>
+          <a:lstStyle/>
+          <a:p>
+            <a:r>
+              <a:rPr sz="2600" b="1">
+                <a:solidFill>
+                  <a:srgbClr val="0B3D2E"/>
+                </a:solidFill>
+              </a:rPr>
+              <a:t>⚠️ Errores comunes</a:t>
+            </a:r>
+          </a:p>
+        </p:txBody>
+      </p:sp>
+      <p:sp>
+        <p:nvSpPr>
+          <p:cNvPr id="3" name="TextBox 2"/>
+          <p:cNvSpPr txBox="1"/>
+          <p:nvPr/>
+        </p:nvSpPr>
+        <p:spPr>
+          <a:xfrm>
+            <a:off x="457200" y="1280160"/>
+            <a:ext cx="8229600" cy="4937760"/>
+          </a:xfrm>
+          <a:prstGeom prst="rect">
+            <a:avLst/>
+          </a:prstGeom>
+          <a:noFill/>
+        </p:spPr>
+        <p:txBody>
+          <a:bodyPr wrap="square">
+            <a:spAutoFit/>
+          </a:bodyPr>
+          <a:lstStyle/>
+          <a:p>
+            <a:pPr>
+              <a:spcAft>
+                <a:spcPts val="600"/>
+              </a:spcAft>
+            </a:pPr>
+            <a:r>
+              <a:rPr sz="1500">
+                <a:solidFill>
+                  <a:srgbClr val="22282E"/>
+                </a:solidFill>
+              </a:rPr>
+              <a:t>•  Prowler falla con AccessDenied en muchos checks — Rol de auditoría sin permisos de lectura; usa la política gestionada de auditoría/seguridad.</a:t>
+            </a:r>
+          </a:p>
+          <a:p>
+            <a:pPr>
+              <a:spcAft>
+                <a:spcPts val="600"/>
+              </a:spcAft>
+            </a:pPr>
+            <a:r>
+              <a:rPr sz="1500">
+                <a:solidFill>
+                  <a:srgbClr val="22282E"/>
+                </a:solidFill>
+              </a:rPr>
+              <a:t>•  Miles de hallazgos abruman al equipo — Falta de priorización; filtra por severidad y exposición antes de repartir trabajo.</a:t>
+            </a:r>
+          </a:p>
+          <a:p>
+            <a:pPr>
+              <a:spcAft>
+                <a:spcPts val="600"/>
+              </a:spcAft>
+            </a:pPr>
+            <a:r>
+              <a:rPr sz="1500">
+                <a:solidFill>
+                  <a:srgbClr val="22282E"/>
+                </a:solidFill>
+              </a:rPr>
+              <a:t>•  Los hallazgos reaparecen — Se corrigió a mano y el IaC volvió a desplegar lo inseguro; corrige también en Terraform.</a:t>
+            </a:r>
+          </a:p>
+          <a:p>
+            <a:pPr>
+              <a:spcAft>
+                <a:spcPts val="600"/>
+              </a:spcAft>
+            </a:pPr>
+            <a:r>
+              <a:rPr sz="1500">
+                <a:solidFill>
+                  <a:srgbClr val="22282E"/>
+                </a:solidFill>
+              </a:rPr>
+              <a:t>•  Informe sin contexto de negocio — Todo tratado igual; añade criticidad del recurso a la priorización.</a:t>
+            </a:r>
+          </a:p>
+          <a:p>
+            <a:pPr>
+              <a:spcAft>
+                <a:spcPts val="600"/>
+              </a:spcAft>
+            </a:pPr>
+            <a:r>
+              <a:rPr sz="1500">
+                <a:solidFill>
+                  <a:srgbClr val="22282E"/>
+                </a:solidFill>
+              </a:rPr>
+              <a:t>•  Auditoría solo una vez — La postura deriva; automatiza ejecuciones periódicas y compara.</a:t>
+            </a:r>
+          </a:p>
+        </p:txBody>
+      </p:sp>
+    </p:spTree>
+  </p:cSld>
+  <p:clrMapOvr>
+    <a:masterClrMapping/>
+  </p:clrMapOvr>
+</p:sld>
+</file>
+
+<file path=ppt/slides/slide14.xml><?xml version="1.0" encoding="utf-8"?>
+<p:sld xmlns:a="http://schemas.openxmlformats.org/drawingml/2006/main" xmlns:p="http://schemas.openxmlformats.org/presentationml/2006/main" xmlns:r="http://schemas.openxmlformats.org/officeDocument/2006/relationships">
+  <p:cSld>
+    <p:spTree>
+      <p:nvGrpSpPr>
+        <p:cNvPr id="1" name=""/>
+        <p:cNvGrpSpPr/>
+        <p:nvPr/>
+      </p:nvGrpSpPr>
+      <p:grpSpPr/>
+      <p:sp>
+        <p:nvSpPr>
+          <p:cNvPr id="2" name="TextBox 1"/>
+          <p:cNvSpPr txBox="1"/>
+          <p:nvPr/>
+        </p:nvSpPr>
+        <p:spPr>
+          <a:xfrm>
+            <a:off x="457200" y="320040"/>
+            <a:ext cx="8229600" cy="822960"/>
+          </a:xfrm>
+          <a:prstGeom prst="rect">
+            <a:avLst/>
+          </a:prstGeom>
+          <a:noFill/>
+        </p:spPr>
+        <p:txBody>
+          <a:bodyPr wrap="square">
+            <a:spAutoFit/>
+          </a:bodyPr>
+          <a:lstStyle/>
+          <a:p>
+            <a:r>
+              <a:rPr sz="2600" b="1">
+                <a:solidFill>
+                  <a:srgbClr val="0B3D2E"/>
+                </a:solidFill>
+              </a:rPr>
+              <a:t>❓ Preguntas frecuentes</a:t>
+            </a:r>
+          </a:p>
+        </p:txBody>
+      </p:sp>
+      <p:sp>
+        <p:nvSpPr>
+          <p:cNvPr id="3" name="TextBox 2"/>
+          <p:cNvSpPr txBox="1"/>
+          <p:nvPr/>
+        </p:nvSpPr>
+        <p:spPr>
+          <a:xfrm>
+            <a:off x="457200" y="1280160"/>
+            <a:ext cx="8229600" cy="4937760"/>
+          </a:xfrm>
+          <a:prstGeom prst="rect">
+            <a:avLst/>
+          </a:prstGeom>
+          <a:noFill/>
+        </p:spPr>
+        <p:txBody>
+          <a:bodyPr wrap="square">
+            <a:spAutoFit/>
+          </a:bodyPr>
+          <a:lstStyle/>
+          <a:p>
+            <a:pPr>
+              <a:spcAft>
+                <a:spcPts val="600"/>
+              </a:spcAft>
+            </a:pPr>
+            <a:r>
+              <a:rPr sz="1500">
+                <a:solidFill>
+                  <a:srgbClr val="22282E"/>
+                </a:solidFill>
+              </a:rPr>
+              <a:t>•  ❓ ¿CSPM sustituye al escaneo de IaC?</a:t>
+            </a:r>
+          </a:p>
+          <a:p>
+            <a:pPr>
+              <a:spcAft>
+                <a:spcPts val="600"/>
+              </a:spcAft>
+            </a:pPr>
+            <a:r>
+              <a:rPr sz="1500">
+                <a:solidFill>
+                  <a:srgbClr val="22282E"/>
+                </a:solidFill>
+              </a:rPr>
+              <a:t>•  No, se complementan. El escaneo IaC (clase 230) previene antes de desplegar; el CSPM detecta lo que ya está desplegado, incluidos cambios manuales o de terceros que el IaC no ve.</a:t>
+            </a:r>
+          </a:p>
+          <a:p>
+            <a:pPr>
+              <a:spcAft>
+                <a:spcPts val="600"/>
+              </a:spcAft>
+            </a:pPr>
+            <a:r>
+              <a:rPr sz="1500">
+                <a:solidFill>
+                  <a:srgbClr val="22282E"/>
+                </a:solidFill>
+              </a:rPr>
+              <a:t>•  ❓ ¿Necesito una herramienta comercial de CSPM?</a:t>
+            </a:r>
+          </a:p>
+          <a:p>
+            <a:pPr>
+              <a:spcAft>
+                <a:spcPts val="600"/>
+              </a:spcAft>
+            </a:pPr>
+            <a:r>
+              <a:rPr sz="1500">
+                <a:solidFill>
+                  <a:srgbClr val="22282E"/>
+                </a:solidFill>
+              </a:rPr>
+              <a:t>•  Para empezar no. Prowler y ScoutSuite cubren muy bien AWS/Azure/GCP con cientos de checks. Las soluciones comerciales añaden correlación, priorización avanzada y remediación automatizada a escala.</a:t>
+            </a:r>
+          </a:p>
+          <a:p>
+            <a:pPr>
+              <a:spcAft>
+                <a:spcPts val="600"/>
+              </a:spcAft>
+            </a:pPr>
+            <a:r>
+              <a:rPr sz="1500">
+                <a:solidFill>
+                  <a:srgbClr val="22282E"/>
+                </a:solidFill>
+              </a:rPr>
+              <a:t>•  ❓ ¿Cómo evito la fatiga de alertas?</a:t>
+            </a:r>
+          </a:p>
+          <a:p>
+            <a:pPr>
+              <a:spcAft>
+                <a:spcPts val="600"/>
+              </a:spcAft>
+            </a:pPr>
+            <a:r>
+              <a:rPr sz="1500">
+                <a:solidFill>
+                  <a:srgbClr val="22282E"/>
+                </a:solidFill>
+              </a:rPr>
+              <a:t>•  Prioriza: no todos los hallazgos importan igual. Cruza severidad con exposición a Internet y criticidad del recurso, remedia primero lo explotable y automatiza la supresión justificada de falsos…</a:t>
+            </a:r>
+          </a:p>
+        </p:txBody>
+      </p:sp>
+    </p:spTree>
+  </p:cSld>
+  <p:clrMapOvr>
+    <a:masterClrMapping/>
+  </p:clrMapOvr>
+</p:sld>
+</file>
+
+<file path=ppt/slides/slide15.xml><?xml version="1.0" encoding="utf-8"?>
+<p:sld xmlns:a="http://schemas.openxmlformats.org/drawingml/2006/main" xmlns:p="http://schemas.openxmlformats.org/presentationml/2006/main" xmlns:r="http://schemas.openxmlformats.org/officeDocument/2006/relationships">
+  <p:cSld>
+    <p:spTree>
+      <p:nvGrpSpPr>
+        <p:cNvPr id="1" name=""/>
+        <p:cNvGrpSpPr/>
+        <p:nvPr/>
+      </p:nvGrpSpPr>
+      <p:grpSpPr/>
+      <p:sp>
+        <p:nvSpPr>
+          <p:cNvPr id="2" name="TextBox 1"/>
+          <p:cNvSpPr txBox="1"/>
+          <p:nvPr/>
+        </p:nvSpPr>
+        <p:spPr>
+          <a:xfrm>
+            <a:off x="457200" y="320040"/>
+            <a:ext cx="8229600" cy="822960"/>
+          </a:xfrm>
+          <a:prstGeom prst="rect">
+            <a:avLst/>
+          </a:prstGeom>
+          <a:noFill/>
+        </p:spPr>
+        <p:txBody>
+          <a:bodyPr wrap="square">
+            <a:spAutoFit/>
+          </a:bodyPr>
+          <a:lstStyle/>
+          <a:p>
+            <a:r>
+              <a:rPr sz="2600" b="1">
+                <a:solidFill>
+                  <a:srgbClr val="0B3D2E"/>
+                </a:solidFill>
+              </a:rPr>
+              <a:t>🔗 Referencias verificables y alcance</a:t>
+            </a:r>
+          </a:p>
+        </p:txBody>
+      </p:sp>
+      <p:sp>
+        <p:nvSpPr>
+          <p:cNvPr id="3" name="TextBox 2"/>
+          <p:cNvSpPr txBox="1"/>
+          <p:nvPr/>
+        </p:nvSpPr>
+        <p:spPr>
+          <a:xfrm>
+            <a:off x="457200" y="1280160"/>
+            <a:ext cx="8229600" cy="4937760"/>
+          </a:xfrm>
+          <a:prstGeom prst="rect">
+            <a:avLst/>
+          </a:prstGeom>
+          <a:noFill/>
+        </p:spPr>
+        <p:txBody>
+          <a:bodyPr wrap="square">
+            <a:spAutoFit/>
+          </a:bodyPr>
+          <a:lstStyle/>
+          <a:p>
+            <a:pPr>
+              <a:spcAft>
+                <a:spcPts val="600"/>
+              </a:spcAft>
+            </a:pPr>
+            <a:r>
+              <a:rPr sz="1500">
+                <a:solidFill>
+                  <a:srgbClr val="22282E"/>
+                </a:solidFill>
+              </a:rPr>
+              <a:t>•  Prowler. &lt;https://github.com/prowler-cloud/prowler&gt; — proyecto primario y checks; fijar versión, provider, regiones y permisos.</a:t>
+            </a:r>
+          </a:p>
+          <a:p>
+            <a:pPr>
+              <a:spcAft>
+                <a:spcPts val="600"/>
+              </a:spcAft>
+            </a:pPr>
+            <a:r>
+              <a:rPr sz="1500">
+                <a:solidFill>
+                  <a:srgbClr val="22282E"/>
+                </a:solidFill>
+              </a:rPr>
+              <a:t>•  ScoutSuite. &lt;https://github.com/nccgroup/ScoutSuite&gt; — proyecto primario de recolección e informe; un reporte HTML no sustituye priorización.</a:t>
+            </a:r>
+          </a:p>
+          <a:p>
+            <a:pPr>
+              <a:spcAft>
+                <a:spcPts val="600"/>
+              </a:spcAft>
+            </a:pPr>
+            <a:r>
+              <a:rPr sz="1500">
+                <a:solidFill>
+                  <a:srgbClr val="22282E"/>
+                </a:solidFill>
+              </a:rPr>
+              <a:t>•  CIS Benchmarks. &lt;https://www.cisecurity.org/cis-benchmarks&gt; — baselines versionadas y perfiladas.</a:t>
+            </a:r>
+          </a:p>
+          <a:p>
+            <a:pPr>
+              <a:spcAft>
+                <a:spcPts val="600"/>
+              </a:spcAft>
+            </a:pPr>
+            <a:r>
+              <a:rPr sz="1500">
+                <a:solidFill>
+                  <a:srgbClr val="22282E"/>
+                </a:solidFill>
+              </a:rPr>
+              <a:t>•  AWS Security Hub. &lt;https://docs.aws.amazon.com/securityhub/&gt; — postura y agregación gestionadas según estándares y regiones habilitados.</a:t>
+            </a:r>
+          </a:p>
+          <a:p>
+            <a:pPr>
+              <a:spcAft>
+                <a:spcPts val="600"/>
+              </a:spcAft>
+            </a:pPr>
+            <a:r>
+              <a:rPr sz="1500">
+                <a:solidFill>
+                  <a:srgbClr val="22282E"/>
+                </a:solidFill>
+              </a:rPr>
+              <a:t>•  Microsoft Defender for Cloud CSPM. &lt;https://learn.microsoft.com/azure/defender-for-cloud/concept-cloud-security-posture-management&gt; — capacidades y planes oficiales actuales.</a:t>
+            </a:r>
+          </a:p>
+        </p:txBody>
+      </p:sp>
+    </p:spTree>
+  </p:cSld>
+  <p:clrMapOvr>
+    <a:masterClrMapping/>
+  </p:clrMapOvr>
+</p:sld>
+</file>
+
+<file path=ppt/slides/slide16.xml><?xml version="1.0" encoding="utf-8"?>
+<p:sld xmlns:a="http://schemas.openxmlformats.org/drawingml/2006/main" xmlns:p="http://schemas.openxmlformats.org/presentationml/2006/main" xmlns:r="http://schemas.openxmlformats.org/officeDocument/2006/relationships">
+  <p:cSld>
+    <p:spTree>
+      <p:nvGrpSpPr>
+        <p:cNvPr id="1" name=""/>
+        <p:cNvGrpSpPr/>
+        <p:nvPr/>
+      </p:nvGrpSpPr>
+      <p:grpSpPr/>
+      <p:sp>
+        <p:nvSpPr>
+          <p:cNvPr id="2" name="TextBox 1"/>
+          <p:cNvSpPr txBox="1"/>
+          <p:nvPr/>
+        </p:nvSpPr>
+        <p:spPr>
+          <a:xfrm>
+            <a:off x="457200" y="274320"/>
+            <a:ext cx="8229600" cy="640080"/>
+          </a:xfrm>
+          <a:prstGeom prst="rect">
+            <a:avLst/>
+          </a:prstGeom>
+          <a:noFill/>
+        </p:spPr>
+        <p:txBody>
+          <a:bodyPr wrap="square">
+            <a:spAutoFit/>
+          </a:bodyPr>
+          <a:lstStyle/>
+          <a:p>
+            <a:r>
+              <a:rPr sz="2200" b="1">
+                <a:solidFill>
+                  <a:srgbClr val="0B3D2E"/>
+                </a:solidFill>
+              </a:rPr>
+              <a:t>Diagrama de la clase</a:t>
+            </a:r>
+          </a:p>
+        </p:txBody>
+      </p:sp>
+      <p:pic>
+        <p:nvPicPr>
+          <p:cNvPr id="3" name="Picture 2" descr="40e1817d34795014.png"/>
+          <p:cNvPicPr>
+            <a:picLocks noChangeAspect="1"/>
+          </p:cNvPicPr>
+          <p:nvPr/>
+        </p:nvPicPr>
+        <p:blipFill>
+          <a:blip r:embed="rId2"/>
+          <a:stretch>
+            <a:fillRect/>
+          </a:stretch>
+        </p:blipFill>
+        <p:spPr>
+          <a:xfrm>
+            <a:off x="457200" y="3483864"/>
+            <a:ext cx="8229600" cy="530352"/>
+          </a:xfrm>
+          <a:prstGeom prst="rect">
+            <a:avLst/>
+          </a:prstGeom>
+        </p:spPr>
+      </p:pic>
     </p:spTree>
   </p:cSld>
   <p:clrMapOvr>
@@ -4137,7 +4708,7 @@
                   <a:srgbClr val="0B3D2E"/>
                 </a:solidFill>
               </a:rPr>
-              <a:t>📖 Definiciones y características</a:t>
+              <a:t>🧠 Explicación en profundidad</a:t>
             </a:r>
           </a:p>
         </p:txBody>
@@ -4175,97 +4746,82 @@
                   <a:srgbClr val="22282E"/>
                 </a:solidFill>
               </a:rPr>
-              <a:t>•  CSPM: gestión continua de la postura de seguridad en la nube. Clave: detecta misconfiguraciones en recursos ya desplegados.</a:t>
-            </a:r>
-          </a:p>
-          <a:p>
-            <a:pPr>
-              <a:spcAft>
-                <a:spcPts val="600"/>
-              </a:spcAft>
-            </a:pPr>
-            <a:r>
-              <a:rPr sz="1500">
-                <a:solidFill>
-                  <a:srgbClr val="22282E"/>
-                </a:solidFill>
-              </a:rPr>
-              <a:t>•  Prowler: herramienta open source con cientos de checks para AWS/Azure/GCP/K8s. Clave: mapea a CIS y otros marcos.</a:t>
-            </a:r>
-          </a:p>
-          <a:p>
-            <a:pPr>
-              <a:spcAft>
-                <a:spcPts val="600"/>
-              </a:spcAft>
-            </a:pPr>
-            <a:r>
-              <a:rPr sz="1500">
-                <a:solidFill>
-                  <a:srgbClr val="22282E"/>
-                </a:solidFill>
-              </a:rPr>
-              <a:t>•  ScoutSuite: auditor multi-cloud que genera un informe HTML navegable. Clave: ideal para revisión visual y priorización.</a:t>
-            </a:r>
-          </a:p>
-          <a:p>
-            <a:pPr>
-              <a:spcAft>
-                <a:spcPts val="600"/>
-              </a:spcAft>
-            </a:pPr>
-            <a:r>
-              <a:rPr sz="1500">
-                <a:solidFill>
-                  <a:srgbClr val="22282E"/>
-                </a:solidFill>
-              </a:rPr>
-              <a:t>•  Baseline de seguridad: conjunto de controles mínimos esperados. Clave: referencia contra la que se mide la postura.</a:t>
-            </a:r>
-          </a:p>
-          <a:p>
-            <a:pPr>
-              <a:spcAft>
-                <a:spcPts val="600"/>
-              </a:spcAft>
-            </a:pPr>
-            <a:r>
-              <a:rPr sz="1500">
-                <a:solidFill>
-                  <a:srgbClr val="22282E"/>
-                </a:solidFill>
-              </a:rPr>
-              <a:t>•  Severidad: clasificación del riesgo de un hallazgo. Clave: guía el orden de remediación.</a:t>
-            </a:r>
-          </a:p>
-          <a:p>
-            <a:pPr>
-              <a:spcAft>
-                <a:spcPts val="600"/>
-              </a:spcAft>
-            </a:pPr>
-            <a:r>
-              <a:rPr sz="1500">
-                <a:solidFill>
-                  <a:srgbClr val="22282E"/>
-                </a:solidFill>
-              </a:rPr>
-              <a:t>•  Drift de postura: aparición de nuevas misconfiguraciones con el tiempo. Clave: exige auditoría continua, no puntual.</a:t>
-            </a:r>
-          </a:p>
-          <a:p>
-            <a:pPr>
-              <a:spcAft>
-                <a:spcPts val="600"/>
-              </a:spcAft>
-            </a:pPr>
-            <a:r>
-              <a:rPr sz="1500">
-                <a:solidFill>
-                  <a:srgbClr val="22282E"/>
-                </a:solidFill>
-              </a:rPr>
-              <a:t>•  Remediación: corrección del hallazgo. Clave: debe medirse (tiempo de cierre, % conforme).</a:t>
+              <a:t>•  CSPM compara configuración efectiva con reglas de seguridad y cumplimiento. El resultado es un hallazgo, no una vulnerabilidad explotable demostrada ni una prioridad empresarial automática. Para…</a:t>
+            </a:r>
+          </a:p>
+          <a:p>
+            <a:pPr>
+              <a:spcAft>
+                <a:spcPts val="600"/>
+              </a:spcAft>
+            </a:pPr>
+            <a:r>
+              <a:rPr sz="1500">
+                <a:solidFill>
+                  <a:srgbClr val="22282E"/>
+                </a:solidFill>
+              </a:rPr>
+              <a:t>•  El ciclo vuelve al check porque la postura cambia. Una corrección manual puede ser revertida por Terraform; una corrección en código puede no alcanzar recursos creados fuera del pipeline. Por eso el…</a:t>
+            </a:r>
+          </a:p>
+          <a:p>
+            <a:pPr>
+              <a:spcAft>
+                <a:spcPts val="600"/>
+              </a:spcAft>
+            </a:pPr>
+            <a:r>
+              <a:rPr sz="1500">
+                <a:solidFill>
+                  <a:srgbClr val="22282E"/>
+                </a:solidFill>
+              </a:rPr>
+              <a:t>•  Prowler y ScoutSuite usan APIs con una credencial. Un AccessDenied puede convertir un check en desconocido, no en conforme. Se documentan cuentas, regiones, servicios, permisos, versión, checks…</a:t>
+            </a:r>
+          </a:p>
+          <a:p>
+            <a:pPr>
+              <a:spcAft>
+                <a:spcPts val="600"/>
+              </a:spcAft>
+            </a:pPr>
+            <a:r>
+              <a:rPr sz="1500">
+                <a:solidFill>
+                  <a:srgbClr val="22282E"/>
+                </a:solidFill>
+              </a:rPr>
+              <a:t>•  Los frameworks aportan requisitos con objetivos distintos. CIS define benchmarks de configuración; PCI DSS, ISO 27001 o una política interna requieren alcance y evidencia adicional. Un mapeo de…</a:t>
+            </a:r>
+          </a:p>
+          <a:p>
+            <a:pPr>
+              <a:spcAft>
+                <a:spcPts val="600"/>
+              </a:spcAft>
+            </a:pPr>
+            <a:r>
+              <a:rPr sz="1500">
+                <a:solidFill>
+                  <a:srgbClr val="22282E"/>
+                </a:solidFill>
+              </a:rPr>
+              <a:t>•  Severidad del producto es un dato. Un bucket públicamente accesible con datos sensibles puede ser urgente; el mismo patrón en un sitio estático previsto requiere revisar integridad, origen y…</a:t>
+            </a:r>
+          </a:p>
+          <a:p>
+            <a:pPr>
+              <a:spcAft>
+                <a:spcPts val="600"/>
+              </a:spcAft>
+            </a:pPr>
+            <a:r>
+              <a:rPr sz="1500">
+                <a:solidFill>
+                  <a:srgbClr val="22282E"/>
+                </a:solidFill>
+              </a:rPr>
+              <a:t>•  Contar hallazgos abiertos castiga inventarios más completos. Se miden cobertura de cuentas y servicios, edad por severidad contextual, tiempo a triage, tiempo a corrección, recurrencia, excepciones…</a:t>
             </a:r>
           </a:p>
         </p:txBody>
@@ -4316,7 +4872,7 @@
                   <a:srgbClr val="0B3D2E"/>
                 </a:solidFill>
               </a:rPr>
-              <a:t>🧰 Herramientas y preparación</a:t>
+              <a:t>📖 Definiciones y características</a:t>
             </a:r>
           </a:p>
         </p:txBody>
@@ -4354,82 +4910,97 @@
                   <a:srgbClr val="22282E"/>
                 </a:solidFill>
               </a:rPr>
-              <a:t>•  Prowler (pip install prowler) y ScoutSuite (pip install scoutsuite).</a:t>
-            </a:r>
-          </a:p>
-          <a:p>
-            <a:pPr>
-              <a:spcAft>
-                <a:spcPts val="600"/>
-              </a:spcAft>
-            </a:pPr>
-            <a:r>
-              <a:rPr sz="1500">
-                <a:solidFill>
-                  <a:srgbClr val="22282E"/>
-                </a:solidFill>
-              </a:rPr>
-              <a:t>•  Credenciales de solo lectura (rol/SA de auditoría) en la cuenta objetivo.</a:t>
-            </a:r>
-          </a:p>
-          <a:p>
-            <a:pPr>
-              <a:spcAft>
-                <a:spcPts val="600"/>
-              </a:spcAft>
-            </a:pPr>
-            <a:r>
-              <a:rPr sz="1500">
-                <a:solidFill>
-                  <a:srgbClr val="22282E"/>
-                </a:solidFill>
-              </a:rPr>
-              <a:t>•  Un directorio para almacenar informes con fecha para comparar evolución.</a:t>
-            </a:r>
-          </a:p>
-          <a:p>
-            <a:pPr>
-              <a:spcAft>
-                <a:spcPts val="600"/>
-              </a:spcAft>
-            </a:pPr>
-            <a:r>
-              <a:rPr sz="1500">
-                <a:solidFill>
-                  <a:srgbClr val="22282E"/>
-                </a:solidFill>
-              </a:rPr>
-              <a:t>•  prowler aws --compliance cis2.0aws -M html json-ocsf csv</a:t>
-            </a:r>
-          </a:p>
-          <a:p>
-            <a:pPr>
-              <a:spcAft>
-                <a:spcPts val="600"/>
-              </a:spcAft>
-            </a:pPr>
-            <a:r>
-              <a:rPr sz="1500">
-                <a:solidFill>
-                  <a:srgbClr val="22282E"/>
-                </a:solidFill>
-              </a:rPr>
-              <a:t>•  scout aws</a:t>
-            </a:r>
-          </a:p>
-          <a:p>
-            <a:pPr>
-              <a:spcAft>
-                <a:spcPts val="600"/>
-              </a:spcAft>
-            </a:pPr>
-            <a:r>
-              <a:rPr sz="1500">
-                <a:solidFill>
-                  <a:srgbClr val="22282E"/>
-                </a:solidFill>
-              </a:rPr>
-              <a:t>•  prowler aws --severity high critical</a:t>
+              <a:t>•  CSPM: gestión continua de la postura de seguridad en la nube. Clave: detecta misconfiguraciones en recursos ya desplegados.</a:t>
+            </a:r>
+          </a:p>
+          <a:p>
+            <a:pPr>
+              <a:spcAft>
+                <a:spcPts val="600"/>
+              </a:spcAft>
+            </a:pPr>
+            <a:r>
+              <a:rPr sz="1500">
+                <a:solidFill>
+                  <a:srgbClr val="22282E"/>
+                </a:solidFill>
+              </a:rPr>
+              <a:t>•  Prowler: herramienta open source con cientos de checks para AWS/Azure/GCP/K8s. Clave: mapea a CIS y otros marcos.</a:t>
+            </a:r>
+          </a:p>
+          <a:p>
+            <a:pPr>
+              <a:spcAft>
+                <a:spcPts val="600"/>
+              </a:spcAft>
+            </a:pPr>
+            <a:r>
+              <a:rPr sz="1500">
+                <a:solidFill>
+                  <a:srgbClr val="22282E"/>
+                </a:solidFill>
+              </a:rPr>
+              <a:t>•  ScoutSuite: auditor multi-cloud que genera un informe HTML navegable. Clave: ideal para revisión visual y priorización.</a:t>
+            </a:r>
+          </a:p>
+          <a:p>
+            <a:pPr>
+              <a:spcAft>
+                <a:spcPts val="600"/>
+              </a:spcAft>
+            </a:pPr>
+            <a:r>
+              <a:rPr sz="1500">
+                <a:solidFill>
+                  <a:srgbClr val="22282E"/>
+                </a:solidFill>
+              </a:rPr>
+              <a:t>•  Baseline de seguridad: conjunto de controles mínimos esperados. Clave: referencia contra la que se mide la postura.</a:t>
+            </a:r>
+          </a:p>
+          <a:p>
+            <a:pPr>
+              <a:spcAft>
+                <a:spcPts val="600"/>
+              </a:spcAft>
+            </a:pPr>
+            <a:r>
+              <a:rPr sz="1500">
+                <a:solidFill>
+                  <a:srgbClr val="22282E"/>
+                </a:solidFill>
+              </a:rPr>
+              <a:t>•  Severidad: estimación técnica producida por una regla o producto. Clave: orienta, pero la prioridad incorpora exposición, datos, privilegio, explotabilidad y negocio.</a:t>
+            </a:r>
+          </a:p>
+          <a:p>
+            <a:pPr>
+              <a:spcAft>
+                <a:spcPts val="600"/>
+              </a:spcAft>
+            </a:pPr>
+            <a:r>
+              <a:rPr sz="1500">
+                <a:solidFill>
+                  <a:srgbClr val="22282E"/>
+                </a:solidFill>
+              </a:rPr>
+              <a:t>•  Drift de postura: aparición de nuevas misconfiguraciones con el tiempo. Clave: exige auditoría continua, no puntual.</a:t>
+            </a:r>
+          </a:p>
+          <a:p>
+            <a:pPr>
+              <a:spcAft>
+                <a:spcPts val="600"/>
+              </a:spcAft>
+            </a:pPr>
+            <a:r>
+              <a:rPr sz="1500">
+                <a:solidFill>
+                  <a:srgbClr val="22282E"/>
+                </a:solidFill>
+              </a:rPr>
+              <a:t>•  Remediación: cambio que corrige causa y estado efectivo. Clave: se aplica al recurso y a su fuente declarativa y se verifica mediante reescaneo y prueba.</a:t>
             </a:r>
           </a:p>
         </p:txBody>
@@ -4480,7 +5051,7 @@
                   <a:srgbClr val="0B3D2E"/>
                 </a:solidFill>
               </a:rPr>
-              <a:t>🧪 Laboratorio guiado</a:t>
+              <a:t>🔍 Caso razonado — dos security groups con el mismo check</a:t>
             </a:r>
           </a:p>
         </p:txBody>
@@ -4518,97 +5089,22 @@
                   <a:srgbClr val="22282E"/>
                 </a:solidFill>
               </a:rPr>
-              <a:t>•  Crea un rol/SA de solo lectura para auditoría en tu cuenta de laboratorio (privilegio mínimo, sin permisos de escritura).</a:t>
-            </a:r>
-          </a:p>
-          <a:p>
-            <a:pPr>
-              <a:spcAft>
-                <a:spcPts val="600"/>
-              </a:spcAft>
-            </a:pPr>
-            <a:r>
-              <a:rPr sz="1500">
-                <a:solidFill>
-                  <a:srgbClr val="22282E"/>
-                </a:solidFill>
-              </a:rPr>
-              <a:t>•  Ejecuta prowler aws --compliance cis2.0aws -M html csv y abre el informe HTML; identifica los hallazgos críticos.</a:t>
-            </a:r>
-          </a:p>
-          <a:p>
-            <a:pPr>
-              <a:spcAft>
-                <a:spcPts val="600"/>
-              </a:spcAft>
-            </a:pPr>
-            <a:r>
-              <a:rPr sz="1500">
-                <a:solidFill>
-                  <a:srgbClr val="22282E"/>
-                </a:solidFill>
-              </a:rPr>
-              <a:t>•  Ejecuta scout aws y navega el informe: compara cómo ScoutSuite agrupa por servicio frente a la vista por control de Prowler.</a:t>
-            </a:r>
-          </a:p>
-          <a:p>
-            <a:pPr>
-              <a:spcAft>
-                <a:spcPts val="600"/>
-              </a:spcAft>
-            </a:pPr>
-            <a:r>
-              <a:rPr sz="1500">
-                <a:solidFill>
-                  <a:srgbClr val="22282E"/>
-                </a:solidFill>
-              </a:rPr>
-              <a:t>•  Prioriza: filtra por --severity critical high y construye una lista de los 10 hallazgos a remediar primero, justificando el orden por impacto.</a:t>
-            </a:r>
-          </a:p>
-          <a:p>
-            <a:pPr>
-              <a:spcAft>
-                <a:spcPts val="600"/>
-              </a:spcAft>
-            </a:pPr>
-            <a:r>
-              <a:rPr sz="1500">
-                <a:solidFill>
-                  <a:srgbClr val="22282E"/>
-                </a:solidFill>
-              </a:rPr>
-              <a:t>•  Remedia al menos tres (por ejemplo: activar cifrado por defecto, cerrar un SG abierto, habilitar CloudTrail) usando lo aprendido en la clase 223.</a:t>
-            </a:r>
-          </a:p>
-          <a:p>
-            <a:pPr>
-              <a:spcAft>
-                <a:spcPts val="600"/>
-              </a:spcAft>
-            </a:pPr>
-            <a:r>
-              <a:rPr sz="1500">
-                <a:solidFill>
-                  <a:srgbClr val="22282E"/>
-                </a:solidFill>
-              </a:rPr>
-              <a:t>•  Vuelve a ejecutar Prowler y compara el número de hallazgos antes/después; calcula el porcentaje de mejora.</a:t>
-            </a:r>
-          </a:p>
-          <a:p>
-            <a:pPr>
-              <a:spcAft>
-                <a:spcPts val="600"/>
-              </a:spcAft>
-            </a:pPr>
-            <a:r>
-              <a:rPr sz="1500">
-                <a:solidFill>
-                  <a:srgbClr val="22282E"/>
-                </a:solidFill>
-              </a:rPr>
-              <a:t>•  Automatiza: programa la auditoría (cron/CI) y guarda los informes con fecha para medir el drift de postura a lo largo del tiempo.</a:t>
+              <a:t>•  Prowler marca dos SG con SSH desde Internet. Uno está asociado a una instancia apagada sin IP pública; el otro a un bastion con IP pública y contraseña habilitada. La regla es idéntica, pero la ruta…</a:t>
+            </a:r>
+          </a:p>
+          <a:p>
+            <a:pPr>
+              <a:spcAft>
+                <a:spcPts val="600"/>
+              </a:spcAft>
+            </a:pPr>
+            <a:r>
+              <a:rPr sz="1500">
+                <a:solidFill>
+                  <a:srgbClr val="22282E"/>
+                </a:solidFill>
+              </a:rPr>
+              <a:t>•  La evidencia de cierre incluye diff IaC, plan, estado efectivo y reescaneo. Si el bastion conserva una excepción temporal, se documentan dueño, origen permitido, MFA/clave, logs y vencimiento.</a:t>
             </a:r>
           </a:p>
         </p:txBody>
@@ -4659,7 +5155,7 @@
                   <a:srgbClr val="0B3D2E"/>
                 </a:solidFill>
               </a:rPr>
-              <a:t>✍️ Ejercicios</a:t>
+              <a:t>✅ Criterio de dominio</a:t>
             </a:r>
           </a:p>
         </p:txBody>
@@ -4697,82 +5193,7 @@
                   <a:srgbClr val="22282E"/>
                 </a:solidFill>
               </a:rPr>
-              <a:t>•  Ejecuta Prowler filtrando por un servicio concreto (p. ej. solo S3) e interpreta la salida.</a:t>
-            </a:r>
-          </a:p>
-          <a:p>
-            <a:pPr>
-              <a:spcAft>
-                <a:spcPts val="600"/>
-              </a:spcAft>
-            </a:pPr>
-            <a:r>
-              <a:rPr sz="1500">
-                <a:solidFill>
-                  <a:srgbClr val="22282E"/>
-                </a:solidFill>
-              </a:rPr>
-              <a:t>•  Genera un informe en formato OCSF/JSON y explica para qué sirve integrarlo en un SIEM.</a:t>
-            </a:r>
-          </a:p>
-          <a:p>
-            <a:pPr>
-              <a:spcAft>
-                <a:spcPts val="600"/>
-              </a:spcAft>
-            </a:pPr>
-            <a:r>
-              <a:rPr sz="1500">
-                <a:solidFill>
-                  <a:srgbClr val="22282E"/>
-                </a:solidFill>
-              </a:rPr>
-              <a:t>•  Mapea cinco hallazgos a su control CIS correspondiente.</a:t>
-            </a:r>
-          </a:p>
-          <a:p>
-            <a:pPr>
-              <a:spcAft>
-                <a:spcPts val="600"/>
-              </a:spcAft>
-            </a:pPr>
-            <a:r>
-              <a:rPr sz="1500">
-                <a:solidFill>
-                  <a:srgbClr val="22282E"/>
-                </a:solidFill>
-              </a:rPr>
-              <a:t>•  Diseña un criterio de priorización que combine severidad y exposición a Internet.</a:t>
-            </a:r>
-          </a:p>
-          <a:p>
-            <a:pPr>
-              <a:spcAft>
-                <a:spcPts val="600"/>
-              </a:spcAft>
-            </a:pPr>
-            <a:r>
-              <a:rPr sz="1500">
-                <a:solidFill>
-                  <a:srgbClr val="22282E"/>
-                </a:solidFill>
-              </a:rPr>
-              <a:t>•  Compara los hallazgos de Prowler y ScoutSuite sobre la misma cuenta y explica diferencias.</a:t>
-            </a:r>
-          </a:p>
-          <a:p>
-            <a:pPr>
-              <a:spcAft>
-                <a:spcPts val="600"/>
-              </a:spcAft>
-            </a:pPr>
-            <a:r>
-              <a:rPr sz="1500">
-                <a:solidFill>
-                  <a:srgbClr val="22282E"/>
-                </a:solidFill>
-              </a:rPr>
-              <a:t>•  Define tres métricas de postura (p. ej. % de recursos conformes, MTTR de remediación).</a:t>
+              <a:t>•  Dominas la clase cuando puedes ejecutar una auditoría con cobertura declarada, distinguir conforme de desconocido, contextualizar hallazgos iguales de forma distinta, corregir recurso e IaC y…</a:t>
             </a:r>
           </a:p>
         </p:txBody>
@@ -4823,7 +5244,7 @@
                   <a:srgbClr val="0B3D2E"/>
                 </a:solidFill>
               </a:rPr>
-              <a:t>📝 Reto verificable</a:t>
+              <a:t>🧰 Herramientas y preparación</a:t>
             </a:r>
           </a:p>
         </p:txBody>
@@ -4861,67 +5282,37 @@
                   <a:srgbClr val="22282E"/>
                 </a:solidFill>
               </a:rPr>
-              <a:t>•  Audita una cuenta de laboratorio, prioriza y remedia hasta reducir a cero los hallazgos críticos, y</a:t>
-            </a:r>
-          </a:p>
-          <a:p>
-            <a:pPr>
-              <a:spcAft>
-                <a:spcPts val="600"/>
-              </a:spcAft>
-            </a:pPr>
-            <a:r>
-              <a:rPr sz="1500">
-                <a:solidFill>
-                  <a:srgbClr val="22282E"/>
-                </a:solidFill>
-              </a:rPr>
-              <a:t>•  documenta la mejora con dos ejecuciones de Prowler (antes/después).</a:t>
-            </a:r>
-          </a:p>
-          <a:p>
-            <a:pPr>
-              <a:spcAft>
-                <a:spcPts val="600"/>
-              </a:spcAft>
-            </a:pPr>
-            <a:r>
-              <a:rPr sz="1500">
-                <a:solidFill>
-                  <a:srgbClr val="22282E"/>
-                </a:solidFill>
-              </a:rPr>
-              <a:t>•  Criterio de aceptación: la segunda ejecución muestra 0 hallazgos críticos y un número de altos</a:t>
-            </a:r>
-          </a:p>
-          <a:p>
-            <a:pPr>
-              <a:spcAft>
-                <a:spcPts val="600"/>
-              </a:spcAft>
-            </a:pPr>
-            <a:r>
-              <a:rPr sz="1500">
-                <a:solidFill>
-                  <a:srgbClr val="22282E"/>
-                </a:solidFill>
-              </a:rPr>
-              <a:t>•  inferior al inicial; el informe incluye la lista priorizada, la evidencia de cada remediación y al</a:t>
-            </a:r>
-          </a:p>
-          <a:p>
-            <a:pPr>
-              <a:spcAft>
-                <a:spcPts val="600"/>
-              </a:spcAft>
-            </a:pPr>
-            <a:r>
-              <a:rPr sz="1500">
-                <a:solidFill>
-                  <a:srgbClr val="22282E"/>
-                </a:solidFill>
-              </a:rPr>
-              <a:t>•  menos una métrica de postura calculada.</a:t>
+              <a:t>•  Prowler (pip install prowler) y ScoutSuite (pip install scoutsuite).</a:t>
+            </a:r>
+          </a:p>
+          <a:p>
+            <a:pPr>
+              <a:spcAft>
+                <a:spcPts val="600"/>
+              </a:spcAft>
+            </a:pPr>
+            <a:r>
+              <a:rPr sz="1500">
+                <a:solidFill>
+                  <a:srgbClr val="22282E"/>
+                </a:solidFill>
+              </a:rPr>
+              <a:t>•  Credenciales de solo lectura (rol/SA de auditoría) en la cuenta objetivo.</a:t>
+            </a:r>
+          </a:p>
+          <a:p>
+            <a:pPr>
+              <a:spcAft>
+                <a:spcPts val="600"/>
+              </a:spcAft>
+            </a:pPr>
+            <a:r>
+              <a:rPr sz="1500">
+                <a:solidFill>
+                  <a:srgbClr val="22282E"/>
+                </a:solidFill>
+              </a:rPr>
+              <a:t>•  Un directorio para almacenar informes con fecha para comparar evolución.</a:t>
             </a:r>
           </a:p>
         </p:txBody>
